--- a/STP/presentations/Session_3/Impact_model_technical_training_port.pptx
+++ b/STP/presentations/Session_3/Impact_model_technical_training_port.pptx
@@ -486,7 +486,7 @@
           <a:p>
             <a:fld id="{F8A8B291-23C9-4CE5-96D0-E0118EB6230C}" type="datetimeFigureOut">
               <a:rPr lang="en-GB" smtClean="0"/>
-              <a:t>27/11/2025</a:t>
+              <a:t>29/11/2025</a:t>
             </a:fld>
             <a:endParaRPr lang="en-GB"/>
           </a:p>
@@ -686,7 +686,7 @@
           <a:p>
             <a:fld id="{F8A8B291-23C9-4CE5-96D0-E0118EB6230C}" type="datetimeFigureOut">
               <a:rPr lang="en-GB" smtClean="0"/>
-              <a:t>27/11/2025</a:t>
+              <a:t>29/11/2025</a:t>
             </a:fld>
             <a:endParaRPr lang="en-GB"/>
           </a:p>
@@ -896,7 +896,7 @@
           <a:p>
             <a:fld id="{F8A8B291-23C9-4CE5-96D0-E0118EB6230C}" type="datetimeFigureOut">
               <a:rPr lang="en-GB" smtClean="0"/>
-              <a:t>27/11/2025</a:t>
+              <a:t>29/11/2025</a:t>
             </a:fld>
             <a:endParaRPr lang="en-GB"/>
           </a:p>
@@ -1096,7 +1096,7 @@
           <a:p>
             <a:fld id="{F8A8B291-23C9-4CE5-96D0-E0118EB6230C}" type="datetimeFigureOut">
               <a:rPr lang="en-GB" smtClean="0"/>
-              <a:t>27/11/2025</a:t>
+              <a:t>29/11/2025</a:t>
             </a:fld>
             <a:endParaRPr lang="en-GB"/>
           </a:p>
@@ -1372,7 +1372,7 @@
           <a:p>
             <a:fld id="{F8A8B291-23C9-4CE5-96D0-E0118EB6230C}" type="datetimeFigureOut">
               <a:rPr lang="en-GB" smtClean="0"/>
-              <a:t>27/11/2025</a:t>
+              <a:t>29/11/2025</a:t>
             </a:fld>
             <a:endParaRPr lang="en-GB"/>
           </a:p>
@@ -1640,7 +1640,7 @@
           <a:p>
             <a:fld id="{F8A8B291-23C9-4CE5-96D0-E0118EB6230C}" type="datetimeFigureOut">
               <a:rPr lang="en-GB" smtClean="0"/>
-              <a:t>27/11/2025</a:t>
+              <a:t>29/11/2025</a:t>
             </a:fld>
             <a:endParaRPr lang="en-GB"/>
           </a:p>
@@ -2055,7 +2055,7 @@
           <a:p>
             <a:fld id="{F8A8B291-23C9-4CE5-96D0-E0118EB6230C}" type="datetimeFigureOut">
               <a:rPr lang="en-GB" smtClean="0"/>
-              <a:t>27/11/2025</a:t>
+              <a:t>29/11/2025</a:t>
             </a:fld>
             <a:endParaRPr lang="en-GB"/>
           </a:p>
@@ -2197,7 +2197,7 @@
           <a:p>
             <a:fld id="{F8A8B291-23C9-4CE5-96D0-E0118EB6230C}" type="datetimeFigureOut">
               <a:rPr lang="en-GB" smtClean="0"/>
-              <a:t>27/11/2025</a:t>
+              <a:t>29/11/2025</a:t>
             </a:fld>
             <a:endParaRPr lang="en-GB"/>
           </a:p>
@@ -2310,7 +2310,7 @@
           <a:p>
             <a:fld id="{F8A8B291-23C9-4CE5-96D0-E0118EB6230C}" type="datetimeFigureOut">
               <a:rPr lang="en-GB" smtClean="0"/>
-              <a:t>27/11/2025</a:t>
+              <a:t>29/11/2025</a:t>
             </a:fld>
             <a:endParaRPr lang="en-GB"/>
           </a:p>
@@ -2623,7 +2623,7 @@
           <a:p>
             <a:fld id="{F8A8B291-23C9-4CE5-96D0-E0118EB6230C}" type="datetimeFigureOut">
               <a:rPr lang="en-GB" smtClean="0"/>
-              <a:t>27/11/2025</a:t>
+              <a:t>29/11/2025</a:t>
             </a:fld>
             <a:endParaRPr lang="en-GB"/>
           </a:p>
@@ -2912,7 +2912,7 @@
           <a:p>
             <a:fld id="{F8A8B291-23C9-4CE5-96D0-E0118EB6230C}" type="datetimeFigureOut">
               <a:rPr lang="en-GB" smtClean="0"/>
-              <a:t>27/11/2025</a:t>
+              <a:t>29/11/2025</a:t>
             </a:fld>
             <a:endParaRPr lang="en-GB"/>
           </a:p>
@@ -3155,7 +3155,7 @@
           <a:p>
             <a:fld id="{F8A8B291-23C9-4CE5-96D0-E0118EB6230C}" type="datetimeFigureOut">
               <a:rPr lang="en-GB" smtClean="0"/>
-              <a:t>27/11/2025</a:t>
+              <a:t>29/11/2025</a:t>
             </a:fld>
             <a:endParaRPr lang="en-GB"/>
           </a:p>
@@ -6829,7 +6829,7 @@
         </p:nvGrpSpPr>
         <p:grpSpPr>
           <a:xfrm>
-            <a:off x="5788771" y="2428568"/>
+            <a:off x="6096000" y="1847409"/>
             <a:ext cx="5326687" cy="3032005"/>
             <a:chOff x="6096000" y="2656539"/>
             <a:chExt cx="4523390" cy="2676215"/>
@@ -6960,6 +6960,91 @@
           </p:spPr>
         </p:pic>
       </p:grpSp>
+      <p:sp>
+        <p:nvSpPr>
+          <p:cNvPr id="4" name="TextBox 3">
+            <a:extLst>
+              <a:ext uri="{FF2B5EF4-FFF2-40B4-BE49-F238E27FC236}">
+                <a16:creationId xmlns:a16="http://schemas.microsoft.com/office/drawing/2014/main" id="{D7649AC0-8CE7-6232-A1E5-8A0B70D4F5CC}"/>
+              </a:ext>
+            </a:extLst>
+          </p:cNvPr>
+          <p:cNvSpPr txBox="1"/>
+          <p:nvPr/>
+        </p:nvSpPr>
+        <p:spPr>
+          <a:xfrm>
+            <a:off x="6349242" y="5176778"/>
+            <a:ext cx="5073445" cy="1169551"/>
+          </a:xfrm>
+          <a:prstGeom prst="rect">
+            <a:avLst/>
+          </a:prstGeom>
+          <a:noFill/>
+        </p:spPr>
+        <p:txBody>
+          <a:bodyPr wrap="square" rtlCol="0">
+            <a:spAutoFit/>
+          </a:bodyPr>
+          <a:lstStyle/>
+          <a:p>
+            <a:pPr marL="285750" indent="-285750">
+              <a:buFont typeface="Arial" panose="020B0604020202020204" pitchFamily="34" charset="0"/>
+              <a:buChar char="•"/>
+            </a:pPr>
+            <a:r>
+              <a:rPr lang="en-GB" sz="1400" b="1" dirty="0"/>
+              <a:t>Points and horizontal line shows 17</a:t>
+            </a:r>
+            <a:r>
+              <a:rPr lang="en-GB" sz="1400" b="1" baseline="30000" dirty="0"/>
+              <a:t>th</a:t>
+            </a:r>
+            <a:r>
+              <a:rPr lang="en-GB" sz="1400" b="1" dirty="0"/>
+              <a:t> and 83</a:t>
+            </a:r>
+            <a:r>
+              <a:rPr lang="en-GB" sz="1400" b="1" baseline="30000" dirty="0"/>
+              <a:t>rd</a:t>
+            </a:r>
+            <a:r>
+              <a:rPr lang="en-GB" sz="1400" b="1" dirty="0"/>
+              <a:t> percentiles of model projections – deemed likely range by IPCC</a:t>
+            </a:r>
+          </a:p>
+          <a:p>
+            <a:pPr marL="285750" indent="-285750">
+              <a:buFont typeface="Arial" panose="020B0604020202020204" pitchFamily="34" charset="0"/>
+              <a:buChar char="•"/>
+            </a:pPr>
+            <a:r>
+              <a:rPr lang="en-GB" sz="1400" b="1" dirty="0"/>
+              <a:t>Vertical line shows ensemble median</a:t>
+            </a:r>
+          </a:p>
+          <a:p>
+            <a:pPr marL="285750" indent="-285750">
+              <a:buFont typeface="Arial" panose="020B0604020202020204" pitchFamily="34" charset="0"/>
+              <a:buChar char="•"/>
+            </a:pPr>
+            <a:r>
+              <a:rPr lang="en-GB" sz="1400" b="1" dirty="0"/>
+              <a:t>Numbers show projected historical biomass</a:t>
+            </a:r>
+          </a:p>
+          <a:p>
+            <a:pPr marL="285750" indent="-285750">
+              <a:buFont typeface="Arial" panose="020B0604020202020204" pitchFamily="34" charset="0"/>
+              <a:buChar char="•"/>
+            </a:pPr>
+            <a:r>
+              <a:rPr lang="en-GB" sz="1400" b="1" dirty="0"/>
+              <a:t>Dashed line shows historical value</a:t>
+            </a:r>
+          </a:p>
+        </p:txBody>
+      </p:sp>
     </p:spTree>
     <p:extLst>
       <p:ext uri="{BB962C8B-B14F-4D97-AF65-F5344CB8AC3E}">
